--- a/docs/presentation_.pptx
+++ b/docs/presentation_.pptx
@@ -6,22 +6,21 @@
   </p:sldMasterIdLst>
   <p:sldIdLst>
     <p:sldId id="256" r:id="rId2"/>
-    <p:sldId id="257" r:id="rId3"/>
-    <p:sldId id="258" r:id="rId4"/>
-    <p:sldId id="259" r:id="rId5"/>
-    <p:sldId id="260" r:id="rId6"/>
-    <p:sldId id="261" r:id="rId7"/>
-    <p:sldId id="262" r:id="rId8"/>
-    <p:sldId id="263" r:id="rId9"/>
-    <p:sldId id="264" r:id="rId10"/>
-    <p:sldId id="265" r:id="rId11"/>
-    <p:sldId id="266" r:id="rId12"/>
-    <p:sldId id="267" r:id="rId13"/>
-    <p:sldId id="268" r:id="rId14"/>
-    <p:sldId id="269" r:id="rId15"/>
-    <p:sldId id="270" r:id="rId16"/>
-    <p:sldId id="271" r:id="rId17"/>
-    <p:sldId id="272" r:id="rId18"/>
+    <p:sldId id="258" r:id="rId3"/>
+    <p:sldId id="259" r:id="rId4"/>
+    <p:sldId id="260" r:id="rId5"/>
+    <p:sldId id="261" r:id="rId6"/>
+    <p:sldId id="262" r:id="rId7"/>
+    <p:sldId id="263" r:id="rId8"/>
+    <p:sldId id="264" r:id="rId9"/>
+    <p:sldId id="265" r:id="rId10"/>
+    <p:sldId id="266" r:id="rId11"/>
+    <p:sldId id="267" r:id="rId12"/>
+    <p:sldId id="268" r:id="rId13"/>
+    <p:sldId id="269" r:id="rId14"/>
+    <p:sldId id="270" r:id="rId15"/>
+    <p:sldId id="271" r:id="rId16"/>
+    <p:sldId id="272" r:id="rId17"/>
   </p:sldIdLst>
   <p:sldSz cx="12192000" cy="6858000"/>
   <p:notesSz cx="6858000" cy="9144000"/>
@@ -3457,116 +3456,6 @@
           <p:cNvPr id="2" name="Cím 1">
             <a:extLst>
               <a:ext uri="{FF2B5EF4-FFF2-40B4-BE49-F238E27FC236}">
-                <a16:creationId xmlns:a16="http://schemas.microsoft.com/office/drawing/2014/main" id="{48114AAC-041F-EAB4-38C4-34F9AB302F59}"/>
-              </a:ext>
-            </a:extLst>
-          </p:cNvPr>
-          <p:cNvSpPr>
-            <a:spLocks noGrp="1"/>
-          </p:cNvSpPr>
-          <p:nvPr>
-            <p:ph type="title"/>
-          </p:nvPr>
-        </p:nvSpPr>
-        <p:spPr/>
-        <p:txBody>
-          <a:bodyPr/>
-          <a:lstStyle/>
-          <a:p>
-            <a:endParaRPr lang="hu-HU"/>
-          </a:p>
-        </p:txBody>
-      </p:sp>
-      <p:sp>
-        <p:nvSpPr>
-          <p:cNvPr id="3" name="Tartalom helye 2">
-            <a:extLst>
-              <a:ext uri="{FF2B5EF4-FFF2-40B4-BE49-F238E27FC236}">
-                <a16:creationId xmlns:a16="http://schemas.microsoft.com/office/drawing/2014/main" id="{B5AF63BB-7724-F042-9154-F12B767093FB}"/>
-              </a:ext>
-            </a:extLst>
-          </p:cNvPr>
-          <p:cNvSpPr>
-            <a:spLocks noGrp="1"/>
-          </p:cNvSpPr>
-          <p:nvPr>
-            <p:ph idx="1"/>
-          </p:nvPr>
-        </p:nvSpPr>
-        <p:spPr/>
-        <p:txBody>
-          <a:bodyPr/>
-          <a:lstStyle/>
-          <a:p>
-            <a:endParaRPr lang="hu-HU"/>
-          </a:p>
-        </p:txBody>
-      </p:sp>
-      <p:pic>
-        <p:nvPicPr>
-          <p:cNvPr id="4" name="Kép 3">
-            <a:extLst>
-              <a:ext uri="{FF2B5EF4-FFF2-40B4-BE49-F238E27FC236}">
-                <a16:creationId xmlns:a16="http://schemas.microsoft.com/office/drawing/2014/main" id="{42F1C3E0-599D-B942-2822-A45732EA2A72}"/>
-              </a:ext>
-            </a:extLst>
-          </p:cNvPr>
-          <p:cNvPicPr>
-            <a:picLocks noChangeAspect="1"/>
-          </p:cNvPicPr>
-          <p:nvPr/>
-        </p:nvPicPr>
-        <p:blipFill>
-          <a:blip r:embed="rId2"/>
-          <a:stretch>
-            <a:fillRect/>
-          </a:stretch>
-        </p:blipFill>
-        <p:spPr>
-          <a:xfrm>
-            <a:off x="0" y="9525"/>
-            <a:ext cx="12192000" cy="6858000"/>
-          </a:xfrm>
-          <a:prstGeom prst="rect">
-            <a:avLst/>
-          </a:prstGeom>
-        </p:spPr>
-      </p:pic>
-    </p:spTree>
-    <p:extLst>
-      <p:ext uri="{BB962C8B-B14F-4D97-AF65-F5344CB8AC3E}">
-        <p14:creationId xmlns:p14="http://schemas.microsoft.com/office/powerpoint/2010/main" val="1608664818"/>
-      </p:ext>
-    </p:extLst>
-  </p:cSld>
-  <p:clrMapOvr>
-    <a:masterClrMapping/>
-  </p:clrMapOvr>
-</p:sld>
-</file>
-
-<file path=ppt/slides/slide11.xml><?xml version="1.0" encoding="utf-8"?>
-<p:sld xmlns:a="http://schemas.openxmlformats.org/drawingml/2006/main" xmlns:r="http://schemas.openxmlformats.org/officeDocument/2006/relationships" xmlns:p="http://schemas.openxmlformats.org/presentationml/2006/main">
-  <p:cSld>
-    <p:spTree>
-      <p:nvGrpSpPr>
-        <p:cNvPr id="1" name=""/>
-        <p:cNvGrpSpPr/>
-        <p:nvPr/>
-      </p:nvGrpSpPr>
-      <p:grpSpPr>
-        <a:xfrm>
-          <a:off x="0" y="0"/>
-          <a:ext cx="0" cy="0"/>
-          <a:chOff x="0" y="0"/>
-          <a:chExt cx="0" cy="0"/>
-        </a:xfrm>
-      </p:grpSpPr>
-      <p:sp>
-        <p:nvSpPr>
-          <p:cNvPr id="2" name="Cím 1">
-            <a:extLst>
-              <a:ext uri="{FF2B5EF4-FFF2-40B4-BE49-F238E27FC236}">
                 <a16:creationId xmlns:a16="http://schemas.microsoft.com/office/drawing/2014/main" id="{B4C69919-E774-CFBE-C68E-DBB541CF63A1}"/>
               </a:ext>
             </a:extLst>
@@ -3655,7 +3544,7 @@
 </p:sld>
 </file>
 
-<file path=ppt/slides/slide12.xml><?xml version="1.0" encoding="utf-8"?>
+<file path=ppt/slides/slide11.xml><?xml version="1.0" encoding="utf-8"?>
 <p:sld xmlns:a="http://schemas.openxmlformats.org/drawingml/2006/main" xmlns:r="http://schemas.openxmlformats.org/officeDocument/2006/relationships" xmlns:p="http://schemas.openxmlformats.org/presentationml/2006/main">
   <p:cSld>
     <p:spTree>
@@ -3765,7 +3654,7 @@
 </p:sld>
 </file>
 
-<file path=ppt/slides/slide13.xml><?xml version="1.0" encoding="utf-8"?>
+<file path=ppt/slides/slide12.xml><?xml version="1.0" encoding="utf-8"?>
 <p:sld xmlns:a="http://schemas.openxmlformats.org/drawingml/2006/main" xmlns:r="http://schemas.openxmlformats.org/officeDocument/2006/relationships" xmlns:p="http://schemas.openxmlformats.org/presentationml/2006/main">
   <p:cSld>
     <p:spTree>
@@ -3875,7 +3764,7 @@
 </p:sld>
 </file>
 
-<file path=ppt/slides/slide14.xml><?xml version="1.0" encoding="utf-8"?>
+<file path=ppt/slides/slide13.xml><?xml version="1.0" encoding="utf-8"?>
 <p:sld xmlns:a="http://schemas.openxmlformats.org/drawingml/2006/main" xmlns:r="http://schemas.openxmlformats.org/officeDocument/2006/relationships" xmlns:p="http://schemas.openxmlformats.org/presentationml/2006/main">
   <p:cSld>
     <p:spTree>
@@ -3985,7 +3874,7 @@
 </p:sld>
 </file>
 
-<file path=ppt/slides/slide15.xml><?xml version="1.0" encoding="utf-8"?>
+<file path=ppt/slides/slide14.xml><?xml version="1.0" encoding="utf-8"?>
 <p:sld xmlns:a="http://schemas.openxmlformats.org/drawingml/2006/main" xmlns:r="http://schemas.openxmlformats.org/officeDocument/2006/relationships" xmlns:p="http://schemas.openxmlformats.org/presentationml/2006/main">
   <p:cSld>
     <p:spTree>
@@ -4095,7 +3984,7 @@
 </p:sld>
 </file>
 
-<file path=ppt/slides/slide16.xml><?xml version="1.0" encoding="utf-8"?>
+<file path=ppt/slides/slide15.xml><?xml version="1.0" encoding="utf-8"?>
 <p:sld xmlns:a="http://schemas.openxmlformats.org/drawingml/2006/main" xmlns:r="http://schemas.openxmlformats.org/officeDocument/2006/relationships" xmlns:p="http://schemas.openxmlformats.org/presentationml/2006/main">
   <p:cSld>
     <p:spTree>
@@ -4205,7 +4094,7 @@
 </p:sld>
 </file>
 
-<file path=ppt/slides/slide17.xml><?xml version="1.0" encoding="utf-8"?>
+<file path=ppt/slides/slide16.xml><?xml version="1.0" encoding="utf-8"?>
 <p:sld xmlns:a="http://schemas.openxmlformats.org/drawingml/2006/main" xmlns:r="http://schemas.openxmlformats.org/officeDocument/2006/relationships" xmlns:p="http://schemas.openxmlformats.org/presentationml/2006/main">
   <p:cSld>
     <p:spTree>
@@ -4337,116 +4226,6 @@
           <p:cNvPr id="2" name="Cím 1">
             <a:extLst>
               <a:ext uri="{FF2B5EF4-FFF2-40B4-BE49-F238E27FC236}">
-                <a16:creationId xmlns:a16="http://schemas.microsoft.com/office/drawing/2014/main" id="{EDBF2370-C937-53E0-8138-87397B9A3788}"/>
-              </a:ext>
-            </a:extLst>
-          </p:cNvPr>
-          <p:cNvSpPr>
-            <a:spLocks noGrp="1"/>
-          </p:cNvSpPr>
-          <p:nvPr>
-            <p:ph type="title"/>
-          </p:nvPr>
-        </p:nvSpPr>
-        <p:spPr/>
-        <p:txBody>
-          <a:bodyPr/>
-          <a:lstStyle/>
-          <a:p>
-            <a:endParaRPr lang="hu-HU"/>
-          </a:p>
-        </p:txBody>
-      </p:sp>
-      <p:sp>
-        <p:nvSpPr>
-          <p:cNvPr id="3" name="Tartalom helye 2">
-            <a:extLst>
-              <a:ext uri="{FF2B5EF4-FFF2-40B4-BE49-F238E27FC236}">
-                <a16:creationId xmlns:a16="http://schemas.microsoft.com/office/drawing/2014/main" id="{FD28DB22-FE66-3036-A39C-1EB979E35D15}"/>
-              </a:ext>
-            </a:extLst>
-          </p:cNvPr>
-          <p:cNvSpPr>
-            <a:spLocks noGrp="1"/>
-          </p:cNvSpPr>
-          <p:nvPr>
-            <p:ph idx="1"/>
-          </p:nvPr>
-        </p:nvSpPr>
-        <p:spPr/>
-        <p:txBody>
-          <a:bodyPr/>
-          <a:lstStyle/>
-          <a:p>
-            <a:endParaRPr lang="hu-HU"/>
-          </a:p>
-        </p:txBody>
-      </p:sp>
-      <p:pic>
-        <p:nvPicPr>
-          <p:cNvPr id="4" name="Kép 3">
-            <a:extLst>
-              <a:ext uri="{FF2B5EF4-FFF2-40B4-BE49-F238E27FC236}">
-                <a16:creationId xmlns:a16="http://schemas.microsoft.com/office/drawing/2014/main" id="{BDB506DA-9429-CCEC-624D-F6E297C8E786}"/>
-              </a:ext>
-            </a:extLst>
-          </p:cNvPr>
-          <p:cNvPicPr>
-            <a:picLocks noChangeAspect="1"/>
-          </p:cNvPicPr>
-          <p:nvPr/>
-        </p:nvPicPr>
-        <p:blipFill>
-          <a:blip r:embed="rId2"/>
-          <a:stretch>
-            <a:fillRect/>
-          </a:stretch>
-        </p:blipFill>
-        <p:spPr>
-          <a:xfrm>
-            <a:off x="0" y="-69087"/>
-            <a:ext cx="12192000" cy="6941516"/>
-          </a:xfrm>
-          <a:prstGeom prst="rect">
-            <a:avLst/>
-          </a:prstGeom>
-        </p:spPr>
-      </p:pic>
-    </p:spTree>
-    <p:extLst>
-      <p:ext uri="{BB962C8B-B14F-4D97-AF65-F5344CB8AC3E}">
-        <p14:creationId xmlns:p14="http://schemas.microsoft.com/office/powerpoint/2010/main" val="1305795290"/>
-      </p:ext>
-    </p:extLst>
-  </p:cSld>
-  <p:clrMapOvr>
-    <a:masterClrMapping/>
-  </p:clrMapOvr>
-</p:sld>
-</file>
-
-<file path=ppt/slides/slide3.xml><?xml version="1.0" encoding="utf-8"?>
-<p:sld xmlns:a="http://schemas.openxmlformats.org/drawingml/2006/main" xmlns:r="http://schemas.openxmlformats.org/officeDocument/2006/relationships" xmlns:p="http://schemas.openxmlformats.org/presentationml/2006/main">
-  <p:cSld>
-    <p:spTree>
-      <p:nvGrpSpPr>
-        <p:cNvPr id="1" name=""/>
-        <p:cNvGrpSpPr/>
-        <p:nvPr/>
-      </p:nvGrpSpPr>
-      <p:grpSpPr>
-        <a:xfrm>
-          <a:off x="0" y="0"/>
-          <a:ext cx="0" cy="0"/>
-          <a:chOff x="0" y="0"/>
-          <a:chExt cx="0" cy="0"/>
-        </a:xfrm>
-      </p:grpSpPr>
-      <p:sp>
-        <p:nvSpPr>
-          <p:cNvPr id="2" name="Cím 1">
-            <a:extLst>
-              <a:ext uri="{FF2B5EF4-FFF2-40B4-BE49-F238E27FC236}">
                 <a16:creationId xmlns:a16="http://schemas.microsoft.com/office/drawing/2014/main" id="{9212DA75-710C-C036-5FD1-096BCE7EEF33}"/>
               </a:ext>
             </a:extLst>
@@ -4542,7 +4321,7 @@
 </p:sld>
 </file>
 
-<file path=ppt/slides/slide4.xml><?xml version="1.0" encoding="utf-8"?>
+<file path=ppt/slides/slide3.xml><?xml version="1.0" encoding="utf-8"?>
 <p:sld xmlns:a="http://schemas.openxmlformats.org/drawingml/2006/main" xmlns:r="http://schemas.openxmlformats.org/officeDocument/2006/relationships" xmlns:p="http://schemas.openxmlformats.org/presentationml/2006/main">
   <p:cSld>
     <p:spTree>
@@ -4652,7 +4431,7 @@
 </p:sld>
 </file>
 
-<file path=ppt/slides/slide5.xml><?xml version="1.0" encoding="utf-8"?>
+<file path=ppt/slides/slide4.xml><?xml version="1.0" encoding="utf-8"?>
 <p:sld xmlns:a="http://schemas.openxmlformats.org/drawingml/2006/main" xmlns:r="http://schemas.openxmlformats.org/officeDocument/2006/relationships" xmlns:p="http://schemas.openxmlformats.org/presentationml/2006/main">
   <p:cSld>
     <p:spTree>
@@ -4762,7 +4541,7 @@
 </p:sld>
 </file>
 
-<file path=ppt/slides/slide6.xml><?xml version="1.0" encoding="utf-8"?>
+<file path=ppt/slides/slide5.xml><?xml version="1.0" encoding="utf-8"?>
 <p:sld xmlns:a="http://schemas.openxmlformats.org/drawingml/2006/main" xmlns:r="http://schemas.openxmlformats.org/officeDocument/2006/relationships" xmlns:p="http://schemas.openxmlformats.org/presentationml/2006/main">
   <p:cSld>
     <p:spTree>
@@ -4872,7 +4651,7 @@
 </p:sld>
 </file>
 
-<file path=ppt/slides/slide7.xml><?xml version="1.0" encoding="utf-8"?>
+<file path=ppt/slides/slide6.xml><?xml version="1.0" encoding="utf-8"?>
 <p:sld xmlns:a="http://schemas.openxmlformats.org/drawingml/2006/main" xmlns:r="http://schemas.openxmlformats.org/officeDocument/2006/relationships" xmlns:p="http://schemas.openxmlformats.org/presentationml/2006/main">
   <p:cSld>
     <p:spTree>
@@ -4982,7 +4761,7 @@
 </p:sld>
 </file>
 
-<file path=ppt/slides/slide8.xml><?xml version="1.0" encoding="utf-8"?>
+<file path=ppt/slides/slide7.xml><?xml version="1.0" encoding="utf-8"?>
 <p:sld xmlns:a="http://schemas.openxmlformats.org/drawingml/2006/main" xmlns:r="http://schemas.openxmlformats.org/officeDocument/2006/relationships" xmlns:p="http://schemas.openxmlformats.org/presentationml/2006/main">
   <p:cSld>
     <p:spTree>
@@ -5092,7 +4871,7 @@
 </p:sld>
 </file>
 
-<file path=ppt/slides/slide9.xml><?xml version="1.0" encoding="utf-8"?>
+<file path=ppt/slides/slide8.xml><?xml version="1.0" encoding="utf-8"?>
 <p:sld xmlns:a="http://schemas.openxmlformats.org/drawingml/2006/main" xmlns:r="http://schemas.openxmlformats.org/officeDocument/2006/relationships" xmlns:p="http://schemas.openxmlformats.org/presentationml/2006/main">
   <p:cSld>
     <p:spTree>
@@ -5193,6 +4972,116 @@
     <p:extLst>
       <p:ext uri="{BB962C8B-B14F-4D97-AF65-F5344CB8AC3E}">
         <p14:creationId xmlns:p14="http://schemas.microsoft.com/office/powerpoint/2010/main" val="2232831722"/>
+      </p:ext>
+    </p:extLst>
+  </p:cSld>
+  <p:clrMapOvr>
+    <a:masterClrMapping/>
+  </p:clrMapOvr>
+</p:sld>
+</file>
+
+<file path=ppt/slides/slide9.xml><?xml version="1.0" encoding="utf-8"?>
+<p:sld xmlns:a="http://schemas.openxmlformats.org/drawingml/2006/main" xmlns:r="http://schemas.openxmlformats.org/officeDocument/2006/relationships" xmlns:p="http://schemas.openxmlformats.org/presentationml/2006/main">
+  <p:cSld>
+    <p:spTree>
+      <p:nvGrpSpPr>
+        <p:cNvPr id="1" name=""/>
+        <p:cNvGrpSpPr/>
+        <p:nvPr/>
+      </p:nvGrpSpPr>
+      <p:grpSpPr>
+        <a:xfrm>
+          <a:off x="0" y="0"/>
+          <a:ext cx="0" cy="0"/>
+          <a:chOff x="0" y="0"/>
+          <a:chExt cx="0" cy="0"/>
+        </a:xfrm>
+      </p:grpSpPr>
+      <p:sp>
+        <p:nvSpPr>
+          <p:cNvPr id="2" name="Cím 1">
+            <a:extLst>
+              <a:ext uri="{FF2B5EF4-FFF2-40B4-BE49-F238E27FC236}">
+                <a16:creationId xmlns:a16="http://schemas.microsoft.com/office/drawing/2014/main" id="{48114AAC-041F-EAB4-38C4-34F9AB302F59}"/>
+              </a:ext>
+            </a:extLst>
+          </p:cNvPr>
+          <p:cNvSpPr>
+            <a:spLocks noGrp="1"/>
+          </p:cNvSpPr>
+          <p:nvPr>
+            <p:ph type="title"/>
+          </p:nvPr>
+        </p:nvSpPr>
+        <p:spPr/>
+        <p:txBody>
+          <a:bodyPr/>
+          <a:lstStyle/>
+          <a:p>
+            <a:endParaRPr lang="hu-HU"/>
+          </a:p>
+        </p:txBody>
+      </p:sp>
+      <p:sp>
+        <p:nvSpPr>
+          <p:cNvPr id="3" name="Tartalom helye 2">
+            <a:extLst>
+              <a:ext uri="{FF2B5EF4-FFF2-40B4-BE49-F238E27FC236}">
+                <a16:creationId xmlns:a16="http://schemas.microsoft.com/office/drawing/2014/main" id="{B5AF63BB-7724-F042-9154-F12B767093FB}"/>
+              </a:ext>
+            </a:extLst>
+          </p:cNvPr>
+          <p:cNvSpPr>
+            <a:spLocks noGrp="1"/>
+          </p:cNvSpPr>
+          <p:nvPr>
+            <p:ph idx="1"/>
+          </p:nvPr>
+        </p:nvSpPr>
+        <p:spPr/>
+        <p:txBody>
+          <a:bodyPr/>
+          <a:lstStyle/>
+          <a:p>
+            <a:endParaRPr lang="hu-HU"/>
+          </a:p>
+        </p:txBody>
+      </p:sp>
+      <p:pic>
+        <p:nvPicPr>
+          <p:cNvPr id="4" name="Kép 3">
+            <a:extLst>
+              <a:ext uri="{FF2B5EF4-FFF2-40B4-BE49-F238E27FC236}">
+                <a16:creationId xmlns:a16="http://schemas.microsoft.com/office/drawing/2014/main" id="{42F1C3E0-599D-B942-2822-A45732EA2A72}"/>
+              </a:ext>
+            </a:extLst>
+          </p:cNvPr>
+          <p:cNvPicPr>
+            <a:picLocks noChangeAspect="1"/>
+          </p:cNvPicPr>
+          <p:nvPr/>
+        </p:nvPicPr>
+        <p:blipFill>
+          <a:blip r:embed="rId2"/>
+          <a:stretch>
+            <a:fillRect/>
+          </a:stretch>
+        </p:blipFill>
+        <p:spPr>
+          <a:xfrm>
+            <a:off x="0" y="9525"/>
+            <a:ext cx="12192000" cy="6858000"/>
+          </a:xfrm>
+          <a:prstGeom prst="rect">
+            <a:avLst/>
+          </a:prstGeom>
+        </p:spPr>
+      </p:pic>
+    </p:spTree>
+    <p:extLst>
+      <p:ext uri="{BB962C8B-B14F-4D97-AF65-F5344CB8AC3E}">
+        <p14:creationId xmlns:p14="http://schemas.microsoft.com/office/powerpoint/2010/main" val="1608664818"/>
       </p:ext>
     </p:extLst>
   </p:cSld>
